--- a/reports/portfolio/latest.pptx
+++ b/reports/portfolio/latest.pptx
@@ -3214,7 +3214,7 @@
                   <a:srgbClr val="555555"/>
                 </a:solidFill>
               </a:rPr>
-              <a:t>생성일: 2026-06-30 03:01 KST</a:t>
+              <a:t>생성일: 2026-06-30 05:18 KST</a:t>
             </a:r>
           </a:p>
         </p:txBody>

--- a/reports/portfolio/latest.pptx
+++ b/reports/portfolio/latest.pptx
@@ -3214,7 +3214,7 @@
                   <a:srgbClr val="555555"/>
                 </a:solidFill>
               </a:rPr>
-              <a:t>생성일: 2026-06-30 05:18 KST</a:t>
+              <a:t>생성일: 2026-06-30 06:48 KST</a:t>
             </a:r>
           </a:p>
         </p:txBody>

--- a/reports/portfolio/latest.pptx
+++ b/reports/portfolio/latest.pptx
@@ -3214,7 +3214,7 @@
                   <a:srgbClr val="555555"/>
                 </a:solidFill>
               </a:rPr>
-              <a:t>생성일: 2026-06-30 06:48 KST</a:t>
+              <a:t>생성일: 2026-06-30 07:44 KST</a:t>
             </a:r>
           </a:p>
         </p:txBody>

--- a/reports/portfolio/latest.pptx
+++ b/reports/portfolio/latest.pptx
@@ -3214,7 +3214,7 @@
                   <a:srgbClr val="555555"/>
                 </a:solidFill>
               </a:rPr>
-              <a:t>생성일: 2026-06-30 07:44 KST</a:t>
+              <a:t>생성일: 2026-06-30 08:46 KST</a:t>
             </a:r>
           </a:p>
         </p:txBody>

--- a/reports/portfolio/latest.pptx
+++ b/reports/portfolio/latest.pptx
@@ -3214,7 +3214,7 @@
                   <a:srgbClr val="555555"/>
                 </a:solidFill>
               </a:rPr>
-              <a:t>생성일: 2026-06-30 08:46 KST</a:t>
+              <a:t>생성일: 2026-06-30 10:54 KST</a:t>
             </a:r>
           </a:p>
         </p:txBody>

--- a/reports/portfolio/latest.pptx
+++ b/reports/portfolio/latest.pptx
@@ -3192,7 +3192,7 @@
                   <a:srgbClr val="555555"/>
                 </a:solidFill>
               </a:rPr>
-              <a:t>분석 기간: 2026-06-29 00:00 ~ 2026-06-29 19:40</a:t>
+              <a:t>분석 기간: 2026-06-29 00:00 ~ 2026-06-30 15:25</a:t>
             </a:r>
           </a:p>
           <a:p>
@@ -3203,7 +3203,7 @@
                   <a:srgbClr val="555555"/>
                 </a:solidFill>
               </a:rPr>
-              <a:t>데이터: 총 237건 · 5분 해상도 · 전국 계통 기준</a:t>
+              <a:t>데이터: 총 474건 · 5분 해상도 · 전국 계통 기준</a:t>
             </a:r>
           </a:p>
           <a:p>
@@ -3214,7 +3214,7 @@
                   <a:srgbClr val="555555"/>
                 </a:solidFill>
               </a:rPr>
-              <a:t>생성일: 2026-06-30 10:54 KST</a:t>
+              <a:t>생성일: 2026-06-30 15:35 KST</a:t>
             </a:r>
           </a:p>
         </p:txBody>
@@ -4059,7 +4059,7 @@
                   <a:srgbClr val="555555"/>
                 </a:solidFill>
               </a:rPr>
-              <a:t>•  총 237건 · 20시간 분량 5분 해상도 수집·분석</a:t>
+              <a:t>•  총 474건 · 39시간 분량 5분 해상도 수집·분석</a:t>
             </a:r>
           </a:p>
           <a:p>
@@ -4074,7 +4074,7 @@
                   <a:srgbClr val="555555"/>
                 </a:solidFill>
               </a:rPr>
-              <a:t>•  다층 이상탐지 결과: EWMA:0건 · CUSUM:18건 · IForest:5건 · 잔차:0건 · LSTM-AE:스킵</a:t>
+              <a:t>•  다층 이상탐지 결과: EWMA:1건 · CUSUM:31건 · IForest:0건 · 잔차:0건 · LSTM-AE:스킵</a:t>
             </a:r>
           </a:p>
           <a:p>

--- a/reports/portfolio/latest.pptx
+++ b/reports/portfolio/latest.pptx
@@ -3192,7 +3192,7 @@
                   <a:srgbClr val="555555"/>
                 </a:solidFill>
               </a:rPr>
-              <a:t>분석 기간: 2026-06-29 00:00 ~ 2026-06-30 15:25</a:t>
+              <a:t>분석 기간: 2026-06-29 00:00 ~ 2026-06-30 18:45</a:t>
             </a:r>
           </a:p>
           <a:p>
@@ -3203,7 +3203,7 @@
                   <a:srgbClr val="555555"/>
                 </a:solidFill>
               </a:rPr>
-              <a:t>데이터: 총 474건 · 5분 해상도 · 전국 계통 기준</a:t>
+              <a:t>데이터: 총 514건 · 5분 해상도 · 전국 계통 기준</a:t>
             </a:r>
           </a:p>
           <a:p>
@@ -3214,7 +3214,7 @@
                   <a:srgbClr val="555555"/>
                 </a:solidFill>
               </a:rPr>
-              <a:t>생성일: 2026-06-30 15:35 KST</a:t>
+              <a:t>생성일: 2026-06-30 19:20 KST</a:t>
             </a:r>
           </a:p>
         </p:txBody>
@@ -4059,7 +4059,7 @@
                   <a:srgbClr val="555555"/>
                 </a:solidFill>
               </a:rPr>
-              <a:t>•  총 474건 · 39시간 분량 5분 해상도 수집·분석</a:t>
+              <a:t>•  총 514건 · 43시간 분량 5분 해상도 수집·분석</a:t>
             </a:r>
           </a:p>
           <a:p>
@@ -4074,7 +4074,7 @@
                   <a:srgbClr val="555555"/>
                 </a:solidFill>
               </a:rPr>
-              <a:t>•  다층 이상탐지 결과: EWMA:1건 · CUSUM:31건 · IForest:0건 · 잔차:0건 · LSTM-AE:스킵</a:t>
+              <a:t>•  다층 이상탐지 결과: EWMA:2건 · CUSUM:34건 · IForest:0건 · 잔차:0건 · LSTM-AE:스킵</a:t>
             </a:r>
           </a:p>
           <a:p>
@@ -4089,7 +4089,7 @@
                   <a:srgbClr val="555555"/>
                 </a:solidFill>
               </a:rPr>
-              <a:t>•  최대 부하: 78,641 MW (06-29 18:30)</a:t>
+              <a:t>•  최대 부하: 79,027 MW (06-30 18:40)</a:t>
             </a:r>
           </a:p>
           <a:p>
@@ -4104,7 +4104,7 @@
                   <a:srgbClr val="555555"/>
                 </a:solidFill>
               </a:rPr>
-              <a:t>•  최저 예비율: 23.6% (06-29 18:55) — 위험 시점</a:t>
+              <a:t>•  최저 예비율: 7.1% (06-30 16:40) — 위험 시점</a:t>
             </a:r>
           </a:p>
           <a:p>

--- a/reports/portfolio/latest.pptx
+++ b/reports/portfolio/latest.pptx
@@ -3192,7 +3192,7 @@
                   <a:srgbClr val="555555"/>
                 </a:solidFill>
               </a:rPr>
-              <a:t>분석 기간: 2026-06-29 00:00 ~ 2026-06-30 18:45</a:t>
+              <a:t>분석 기간: 2026-06-29 00:00 ~ 2026-06-30 20:45</a:t>
             </a:r>
           </a:p>
           <a:p>
@@ -3203,7 +3203,7 @@
                   <a:srgbClr val="555555"/>
                 </a:solidFill>
               </a:rPr>
-              <a:t>데이터: 총 514건 · 5분 해상도 · 전국 계통 기준</a:t>
+              <a:t>데이터: 총 538건 · 5분 해상도 · 전국 계통 기준</a:t>
             </a:r>
           </a:p>
           <a:p>
@@ -3214,7 +3214,7 @@
                   <a:srgbClr val="555555"/>
                 </a:solidFill>
               </a:rPr>
-              <a:t>생성일: 2026-06-30 19:20 KST</a:t>
+              <a:t>생성일: 2026-06-30 21:27 KST</a:t>
             </a:r>
           </a:p>
         </p:txBody>
@@ -4059,7 +4059,7 @@
                   <a:srgbClr val="555555"/>
                 </a:solidFill>
               </a:rPr>
-              <a:t>•  총 514건 · 43시간 분량 5분 해상도 수집·분석</a:t>
+              <a:t>•  총 538건 · 45시간 분량 5분 해상도 수집·분석</a:t>
             </a:r>
           </a:p>
           <a:p>
@@ -4074,7 +4074,7 @@
                   <a:srgbClr val="555555"/>
                 </a:solidFill>
               </a:rPr>
-              <a:t>•  다층 이상탐지 결과: EWMA:2건 · CUSUM:34건 · IForest:0건 · 잔차:0건 · LSTM-AE:스킵</a:t>
+              <a:t>•  다층 이상탐지 결과: EWMA:2건 · CUSUM:37건 · IForest:0건 · 잔차:0건 · LSTM-AE:스킵</a:t>
             </a:r>
           </a:p>
           <a:p>

--- a/reports/portfolio/latest.pptx
+++ b/reports/portfolio/latest.pptx
@@ -3214,7 +3214,7 @@
                   <a:srgbClr val="555555"/>
                 </a:solidFill>
               </a:rPr>
-              <a:t>생성일: 2026-07-01 00:21 KST</a:t>
+              <a:t>생성일: 2026-07-01 02:32 KST</a:t>
             </a:r>
           </a:p>
         </p:txBody>

--- a/reports/portfolio/latest.pptx
+++ b/reports/portfolio/latest.pptx
@@ -3214,7 +3214,7 @@
                   <a:srgbClr val="555555"/>
                 </a:solidFill>
               </a:rPr>
-              <a:t>생성일: 2026-07-01 02:32 KST</a:t>
+              <a:t>생성일: 2026-07-01 04:26 KST</a:t>
             </a:r>
           </a:p>
         </p:txBody>

--- a/reports/portfolio/latest.pptx
+++ b/reports/portfolio/latest.pptx
@@ -3214,7 +3214,7 @@
                   <a:srgbClr val="555555"/>
                 </a:solidFill>
               </a:rPr>
-              <a:t>생성일: 2026-07-01 04:26 KST</a:t>
+              <a:t>생성일: 2026-07-01 06:20 KST</a:t>
             </a:r>
           </a:p>
         </p:txBody>

--- a/reports/portfolio/latest.pptx
+++ b/reports/portfolio/latest.pptx
@@ -3214,7 +3214,7 @@
                   <a:srgbClr val="555555"/>
                 </a:solidFill>
               </a:rPr>
-              <a:t>생성일: 2026-07-01 06:20 KST</a:t>
+              <a:t>생성일: 2026-07-01 07:47 KST</a:t>
             </a:r>
           </a:p>
         </p:txBody>

--- a/reports/portfolio/latest.pptx
+++ b/reports/portfolio/latest.pptx
@@ -3192,7 +3192,7 @@
                   <a:srgbClr val="555555"/>
                 </a:solidFill>
               </a:rPr>
-              <a:t>분석 기간: 2026-06-29 00:00 ~ 2026-06-30 23:30</a:t>
+              <a:t>분석 기간: 2026-06-29 00:00 ~ 2026-07-01 08:45</a:t>
             </a:r>
           </a:p>
           <a:p>
@@ -3203,7 +3203,7 @@
                   <a:srgbClr val="555555"/>
                 </a:solidFill>
               </a:rPr>
-              <a:t>데이터: 총 571건 · 5분 해상도 · 전국 계통 기준</a:t>
+              <a:t>데이터: 총 682건 · 5분 해상도 · 전국 계통 기준</a:t>
             </a:r>
           </a:p>
           <a:p>
@@ -3214,7 +3214,7 @@
                   <a:srgbClr val="555555"/>
                 </a:solidFill>
               </a:rPr>
-              <a:t>생성일: 2026-07-01 07:47 KST</a:t>
+              <a:t>생성일: 2026-07-01 08:55 KST</a:t>
             </a:r>
           </a:p>
         </p:txBody>
@@ -4059,7 +4059,7 @@
                   <a:srgbClr val="555555"/>
                 </a:solidFill>
               </a:rPr>
-              <a:t>•  총 571건 · 48시간 분량 5분 해상도 수집·분석</a:t>
+              <a:t>•  총 682건 · 57시간 분량 5분 해상도 수집·분석</a:t>
             </a:r>
           </a:p>
           <a:p>
@@ -4074,7 +4074,7 @@
                   <a:srgbClr val="555555"/>
                 </a:solidFill>
               </a:rPr>
-              <a:t>•  다층 이상탐지 결과: EWMA:2건 · CUSUM:41건 · IForest:0건 · 잔차:0건 · LSTM-AE:스킵</a:t>
+              <a:t>•  다층 이상탐지 결과: EWMA:2건 · CUSUM:48건 · IForest:0건 · 잔차:0건 · LSTM-AE:스킵</a:t>
             </a:r>
           </a:p>
           <a:p>

--- a/reports/portfolio/latest.pptx
+++ b/reports/portfolio/latest.pptx
@@ -3193,7 +3193,7 @@
                   <a:srgbClr val="555555"/>
                 </a:solidFill>
               </a:rPr>
-              <a:t>분석 기간: 2026-06-29 00:00 ~ 2026-07-02 19:55</a:t>
+              <a:t>분석 기간: 2026-06-29 00:00 ~ 2026-07-02 20:00</a:t>
             </a:r>
           </a:p>
           <a:p>
@@ -3204,7 +3204,7 @@
                   <a:srgbClr val="555555"/>
                 </a:solidFill>
               </a:rPr>
-              <a:t>데이터: 총 1,104건 · 5분 해상도 · 전국 계통 기준</a:t>
+              <a:t>데이터: 총 1,105건 · 5분 해상도 · 전국 계통 기준</a:t>
             </a:r>
           </a:p>
           <a:p>
@@ -3215,7 +3215,7 @@
                   <a:srgbClr val="555555"/>
                 </a:solidFill>
               </a:rPr>
-              <a:t>생성일: 2026-07-02 20:03 KST</a:t>
+              <a:t>생성일: 2026-07-02 22:12 KST</a:t>
             </a:r>
           </a:p>
         </p:txBody>
@@ -4170,7 +4170,7 @@
                   <a:srgbClr val="555555"/>
                 </a:solidFill>
               </a:rPr>
-              <a:t>•  총 1,104건 · 92시간 분량 5분 해상도 수집·분석</a:t>
+              <a:t>•  총 1,105건 · 92시간 분량 5분 해상도 수집·분석</a:t>
             </a:r>
           </a:p>
           <a:p>

--- a/reports/portfolio/latest.pptx
+++ b/reports/portfolio/latest.pptx
@@ -3215,7 +3215,7 @@
                   <a:srgbClr val="555555"/>
                 </a:solidFill>
               </a:rPr>
-              <a:t>생성일: 2026-07-03 00:36 KST</a:t>
+              <a:t>생성일: 2026-07-03 02:22 KST</a:t>
             </a:r>
           </a:p>
         </p:txBody>

--- a/reports/portfolio/latest.pptx
+++ b/reports/portfolio/latest.pptx
@@ -3215,7 +3215,7 @@
                   <a:srgbClr val="555555"/>
                 </a:solidFill>
               </a:rPr>
-              <a:t>생성일: 2026-07-03 02:22 KST</a:t>
+              <a:t>생성일: 2026-07-03 04:03 KST</a:t>
             </a:r>
           </a:p>
         </p:txBody>

--- a/reports/portfolio/latest.pptx
+++ b/reports/portfolio/latest.pptx
@@ -3215,7 +3215,7 @@
                   <a:srgbClr val="555555"/>
                 </a:solidFill>
               </a:rPr>
-              <a:t>생성일: 2026-07-03 04:03 KST</a:t>
+              <a:t>생성일: 2026-07-03 05:38 KST</a:t>
             </a:r>
           </a:p>
         </p:txBody>

--- a/reports/portfolio/latest.pptx
+++ b/reports/portfolio/latest.pptx
@@ -3215,7 +3215,7 @@
                   <a:srgbClr val="555555"/>
                 </a:solidFill>
               </a:rPr>
-              <a:t>생성일: 2026-07-03 05:38 KST</a:t>
+              <a:t>생성일: 2026-07-03 06:54 KST</a:t>
             </a:r>
           </a:p>
         </p:txBody>

--- a/reports/portfolio/latest.pptx
+++ b/reports/portfolio/latest.pptx
@@ -3215,7 +3215,7 @@
                   <a:srgbClr val="555555"/>
                 </a:solidFill>
               </a:rPr>
-              <a:t>생성일: 2026-07-03 06:54 KST</a:t>
+              <a:t>생성일: 2026-07-03 08:33 KST</a:t>
             </a:r>
           </a:p>
         </p:txBody>

--- a/reports/portfolio/latest.pptx
+++ b/reports/portfolio/latest.pptx
@@ -3193,7 +3193,7 @@
                   <a:srgbClr val="555555"/>
                 </a:solidFill>
               </a:rPr>
-              <a:t>분석 기간: 2026-06-29 00:00 ~ 2026-07-02 23:50</a:t>
+              <a:t>분석 기간: 2026-06-29 00:00 ~ 2026-07-03 17:35</a:t>
             </a:r>
           </a:p>
           <a:p>
@@ -3204,7 +3204,7 @@
                   <a:srgbClr val="555555"/>
                 </a:solidFill>
               </a:rPr>
-              <a:t>데이터: 총 1,151건 · 5분 해상도 · 전국 계통 기준</a:t>
+              <a:t>데이터: 총 1,364건 · 5분 해상도 · 전국 계통 기준</a:t>
             </a:r>
           </a:p>
           <a:p>
@@ -3215,7 +3215,7 @@
                   <a:srgbClr val="555555"/>
                 </a:solidFill>
               </a:rPr>
-              <a:t>생성일: 2026-07-03 08:33 KST</a:t>
+              <a:t>생성일: 2026-07-03 17:41 KST</a:t>
             </a:r>
           </a:p>
         </p:txBody>
@@ -4170,7 +4170,7 @@
                   <a:srgbClr val="555555"/>
                 </a:solidFill>
               </a:rPr>
-              <a:t>•  총 1,151건 · 96시간 분량 5분 해상도 수집·분석</a:t>
+              <a:t>•  총 1,364건 · 114시간 분량 5분 해상도 수집·분석</a:t>
             </a:r>
           </a:p>
           <a:p>
@@ -4185,7 +4185,7 @@
                   <a:srgbClr val="555555"/>
                 </a:solidFill>
               </a:rPr>
-              <a:t>•  다층 이상탐지 결과: EWMA:3건 · CUSUM:75건 · IForest:0건 · 잔차:0건 · LSTM-AE:스킵</a:t>
+              <a:t>•  다층 이상탐지 결과: EWMA:4건 · CUSUM:92건 · IForest:0건 · 잔차:0건 · LSTM-AE:스킵</a:t>
             </a:r>
           </a:p>
           <a:p>

--- a/reports/portfolio/latest.pptx
+++ b/reports/portfolio/latest.pptx
@@ -3193,7 +3193,7 @@
                   <a:srgbClr val="555555"/>
                 </a:solidFill>
               </a:rPr>
-              <a:t>분석 기간: 2026-06-29 00:00 ~ 2026-07-03 17:35</a:t>
+              <a:t>분석 기간: 2026-06-29 00:00 ~ 2026-07-03 19:40</a:t>
             </a:r>
           </a:p>
           <a:p>
@@ -3204,7 +3204,7 @@
                   <a:srgbClr val="555555"/>
                 </a:solidFill>
               </a:rPr>
-              <a:t>데이터: 총 1,364건 · 5분 해상도 · 전국 계통 기준</a:t>
+              <a:t>데이터: 총 1,389건 · 5분 해상도 · 전국 계통 기준</a:t>
             </a:r>
           </a:p>
           <a:p>
@@ -3215,7 +3215,7 @@
                   <a:srgbClr val="555555"/>
                 </a:solidFill>
               </a:rPr>
-              <a:t>생성일: 2026-07-03 17:41 KST</a:t>
+              <a:t>생성일: 2026-07-03 20:19 KST</a:t>
             </a:r>
           </a:p>
         </p:txBody>
@@ -4170,7 +4170,7 @@
                   <a:srgbClr val="555555"/>
                 </a:solidFill>
               </a:rPr>
-              <a:t>•  총 1,364건 · 114시간 분량 5분 해상도 수집·분석</a:t>
+              <a:t>•  총 1,389건 · 116시간 분량 5분 해상도 수집·분석</a:t>
             </a:r>
           </a:p>
           <a:p>
@@ -4185,7 +4185,7 @@
                   <a:srgbClr val="555555"/>
                 </a:solidFill>
               </a:rPr>
-              <a:t>•  다층 이상탐지 결과: EWMA:4건 · CUSUM:92건 · IForest:0건 · 잔차:0건 · LSTM-AE:스킵</a:t>
+              <a:t>•  다층 이상탐지 결과: EWMA:4건 · CUSUM:93건 · IForest:0건 · 잔차:0건 · LSTM-AE:스킵</a:t>
             </a:r>
           </a:p>
           <a:p>

--- a/reports/portfolio/latest.pptx
+++ b/reports/portfolio/latest.pptx
@@ -3215,7 +3215,7 @@
                   <a:srgbClr val="555555"/>
                 </a:solidFill>
               </a:rPr>
-              <a:t>생성일: 2026-07-03 20:19 KST</a:t>
+              <a:t>생성일: 2026-07-03 22:18 KST</a:t>
             </a:r>
           </a:p>
         </p:txBody>

--- a/reports/portfolio/latest.pptx
+++ b/reports/portfolio/latest.pptx
@@ -3215,7 +3215,7 @@
                   <a:srgbClr val="555555"/>
                 </a:solidFill>
               </a:rPr>
-              <a:t>생성일: 2026-07-04 00:31 KST</a:t>
+              <a:t>생성일: 2026-07-04 02:06 KST</a:t>
             </a:r>
           </a:p>
         </p:txBody>

--- a/reports/portfolio/latest.pptx
+++ b/reports/portfolio/latest.pptx
@@ -3215,7 +3215,7 @@
                   <a:srgbClr val="555555"/>
                 </a:solidFill>
               </a:rPr>
-              <a:t>생성일: 2026-07-04 02:06 KST</a:t>
+              <a:t>생성일: 2026-07-04 03:42 KST</a:t>
             </a:r>
           </a:p>
         </p:txBody>

--- a/reports/portfolio/latest.pptx
+++ b/reports/portfolio/latest.pptx
@@ -3215,7 +3215,7 @@
                   <a:srgbClr val="555555"/>
                 </a:solidFill>
               </a:rPr>
-              <a:t>생성일: 2026-07-04 03:42 KST</a:t>
+              <a:t>생성일: 2026-07-04 05:06 KST</a:t>
             </a:r>
           </a:p>
         </p:txBody>

--- a/reports/portfolio/latest.pptx
+++ b/reports/portfolio/latest.pptx
@@ -3215,7 +3215,7 @@
                   <a:srgbClr val="555555"/>
                 </a:solidFill>
               </a:rPr>
-              <a:t>생성일: 2026-07-04 05:06 KST</a:t>
+              <a:t>생성일: 2026-07-04 06:35 KST</a:t>
             </a:r>
           </a:p>
         </p:txBody>

--- a/reports/portfolio/latest.pptx
+++ b/reports/portfolio/latest.pptx
@@ -3215,7 +3215,7 @@
                   <a:srgbClr val="555555"/>
                 </a:solidFill>
               </a:rPr>
-              <a:t>생성일: 2026-07-04 06:35 KST</a:t>
+              <a:t>생성일: 2026-07-04 07:46 KST</a:t>
             </a:r>
           </a:p>
         </p:txBody>

--- a/reports/portfolio/latest.pptx
+++ b/reports/portfolio/latest.pptx
@@ -3215,7 +3215,7 @@
                   <a:srgbClr val="555555"/>
                 </a:solidFill>
               </a:rPr>
-              <a:t>생성일: 2026-07-04 07:46 KST</a:t>
+              <a:t>생성일: 2026-07-04 08:50 KST</a:t>
             </a:r>
           </a:p>
         </p:txBody>

--- a/reports/portfolio/latest.pptx
+++ b/reports/portfolio/latest.pptx
@@ -3215,7 +3215,7 @@
                   <a:srgbClr val="555555"/>
                 </a:solidFill>
               </a:rPr>
-              <a:t>생성일: 2026-07-04 08:50 KST</a:t>
+              <a:t>생성일: 2026-07-04 10:45 KST</a:t>
             </a:r>
           </a:p>
         </p:txBody>

--- a/reports/portfolio/latest.pptx
+++ b/reports/portfolio/latest.pptx
@@ -3215,7 +3215,7 @@
                   <a:srgbClr val="555555"/>
                 </a:solidFill>
               </a:rPr>
-              <a:t>생성일: 2026-07-04 10:45 KST</a:t>
+              <a:t>생성일: 2026-07-04 14:31 KST</a:t>
             </a:r>
           </a:p>
         </p:txBody>

--- a/reports/portfolio/latest.pptx
+++ b/reports/portfolio/latest.pptx
@@ -3215,7 +3215,7 @@
                   <a:srgbClr val="555555"/>
                 </a:solidFill>
               </a:rPr>
-              <a:t>생성일: 2026-07-04 14:31 KST</a:t>
+              <a:t>생성일: 2026-07-04 17:15 KST</a:t>
             </a:r>
           </a:p>
         </p:txBody>

--- a/reports/portfolio/latest.pptx
+++ b/reports/portfolio/latest.pptx
@@ -3215,7 +3215,7 @@
                   <a:srgbClr val="555555"/>
                 </a:solidFill>
               </a:rPr>
-              <a:t>생성일: 2026-07-04 17:15 KST</a:t>
+              <a:t>생성일: 2026-07-04 19:28 KST</a:t>
             </a:r>
           </a:p>
         </p:txBody>

--- a/reports/portfolio/latest.pptx
+++ b/reports/portfolio/latest.pptx
@@ -3215,7 +3215,7 @@
                   <a:srgbClr val="555555"/>
                 </a:solidFill>
               </a:rPr>
-              <a:t>생성일: 2026-07-04 19:28 KST</a:t>
+              <a:t>생성일: 2026-07-04 20:58 KST</a:t>
             </a:r>
           </a:p>
         </p:txBody>

--- a/reports/portfolio/latest.pptx
+++ b/reports/portfolio/latest.pptx
@@ -3215,7 +3215,7 @@
                   <a:srgbClr val="555555"/>
                 </a:solidFill>
               </a:rPr>
-              <a:t>생성일: 2026-07-04 20:58 KST</a:t>
+              <a:t>생성일: 2026-07-04 23:04 KST</a:t>
             </a:r>
           </a:p>
         </p:txBody>

--- a/reports/portfolio/latest.pptx
+++ b/reports/portfolio/latest.pptx
@@ -3193,7 +3193,7 @@
                   <a:srgbClr val="555555"/>
                 </a:solidFill>
               </a:rPr>
-              <a:t>분석 기간: 2026-06-29 00:00 ~ 2026-07-05 00:25</a:t>
+              <a:t>분석 기간: 2026-06-29 00:00 ~ 2026-07-05 01:05</a:t>
             </a:r>
           </a:p>
           <a:p>
@@ -3204,7 +3204,7 @@
                   <a:srgbClr val="555555"/>
                 </a:solidFill>
               </a:rPr>
-              <a:t>데이터: 총 1,734건 · 5분 해상도 · 전국 계통 기준</a:t>
+              <a:t>데이터: 총 1,742건 · 5분 해상도 · 전국 계통 기준</a:t>
             </a:r>
           </a:p>
           <a:p>
@@ -3215,7 +3215,7 @@
                   <a:srgbClr val="555555"/>
                 </a:solidFill>
               </a:rPr>
-              <a:t>생성일: 2026-07-05 00:35 KST</a:t>
+              <a:t>생성일: 2026-07-05 01:45 KST</a:t>
             </a:r>
           </a:p>
         </p:txBody>
@@ -4170,7 +4170,7 @@
                   <a:srgbClr val="555555"/>
                 </a:solidFill>
               </a:rPr>
-              <a:t>•  총 1,734건 · 144시간 분량 5분 해상도 수집·분석</a:t>
+              <a:t>•  총 1,742건 · 145시간 분량 5분 해상도 수집·분석</a:t>
             </a:r>
           </a:p>
           <a:p>
@@ -4185,7 +4185,7 @@
                   <a:srgbClr val="555555"/>
                 </a:solidFill>
               </a:rPr>
-              <a:t>•  다층 이상탐지 결과: EWMA:5건 · CUSUM:123건 · IForest:0건 · 잔차:0건 · LSTM-AE:스킵</a:t>
+              <a:t>•  다층 이상탐지 결과: EWMA:5건 · CUSUM:121건 · IForest:0건 · 잔차:0건 · LSTM-AE:스킵</a:t>
             </a:r>
           </a:p>
           <a:p>

--- a/reports/portfolio/latest.pptx
+++ b/reports/portfolio/latest.pptx
@@ -3215,7 +3215,7 @@
                   <a:srgbClr val="555555"/>
                 </a:solidFill>
               </a:rPr>
-              <a:t>생성일: 2026-07-05 01:45 KST</a:t>
+              <a:t>생성일: 2026-07-05 02:49 KST</a:t>
             </a:r>
           </a:p>
         </p:txBody>

--- a/reports/portfolio/latest.pptx
+++ b/reports/portfolio/latest.pptx
@@ -3215,7 +3215,7 @@
                   <a:srgbClr val="555555"/>
                 </a:solidFill>
               </a:rPr>
-              <a:t>생성일: 2026-07-05 02:49 KST</a:t>
+              <a:t>생성일: 2026-07-05 03:47 KST</a:t>
             </a:r>
           </a:p>
         </p:txBody>

--- a/reports/portfolio/latest.pptx
+++ b/reports/portfolio/latest.pptx
@@ -3215,7 +3215,7 @@
                   <a:srgbClr val="555555"/>
                 </a:solidFill>
               </a:rPr>
-              <a:t>생성일: 2026-07-05 03:47 KST</a:t>
+              <a:t>생성일: 2026-07-05 05:01 KST</a:t>
             </a:r>
           </a:p>
         </p:txBody>

--- a/reports/portfolio/latest.pptx
+++ b/reports/portfolio/latest.pptx
@@ -3215,7 +3215,7 @@
                   <a:srgbClr val="555555"/>
                 </a:solidFill>
               </a:rPr>
-              <a:t>생성일: 2026-07-05 05:01 KST</a:t>
+              <a:t>생성일: 2026-07-05 06:16 KST</a:t>
             </a:r>
           </a:p>
         </p:txBody>

--- a/reports/portfolio/latest.pptx
+++ b/reports/portfolio/latest.pptx
@@ -3215,7 +3215,7 @@
                   <a:srgbClr val="555555"/>
                 </a:solidFill>
               </a:rPr>
-              <a:t>생성일: 2026-07-05 06:16 KST</a:t>
+              <a:t>생성일: 2026-07-05 07:15 KST</a:t>
             </a:r>
           </a:p>
         </p:txBody>

--- a/reports/portfolio/latest.pptx
+++ b/reports/portfolio/latest.pptx
@@ -3215,7 +3215,7 @@
                   <a:srgbClr val="555555"/>
                 </a:solidFill>
               </a:rPr>
-              <a:t>생성일: 2026-07-05 07:15 KST</a:t>
+              <a:t>생성일: 2026-07-05 08:18 KST</a:t>
             </a:r>
           </a:p>
         </p:txBody>

--- a/reports/portfolio/latest.pptx
+++ b/reports/portfolio/latest.pptx
@@ -3215,7 +3215,7 @@
                   <a:srgbClr val="555555"/>
                 </a:solidFill>
               </a:rPr>
-              <a:t>생성일: 2026-07-05 08:18 KST</a:t>
+              <a:t>생성일: 2026-07-05 10:12 KST</a:t>
             </a:r>
           </a:p>
         </p:txBody>

--- a/reports/portfolio/latest.pptx
+++ b/reports/portfolio/latest.pptx
@@ -3193,7 +3193,7 @@
                   <a:srgbClr val="555555"/>
                 </a:solidFill>
               </a:rPr>
-              <a:t>분석 기간: 2026-06-29 00:00 ~ 2026-07-05 01:05</a:t>
+              <a:t>분석 기간: 2026-06-29 00:00 ~ 2026-07-05 19:40</a:t>
             </a:r>
           </a:p>
           <a:p>
@@ -3204,7 +3204,7 @@
                   <a:srgbClr val="555555"/>
                 </a:solidFill>
               </a:rPr>
-              <a:t>데이터: 총 1,742건 · 5분 해상도 · 전국 계통 기준</a:t>
+              <a:t>데이터: 총 1,965건 · 5분 해상도 · 전국 계통 기준</a:t>
             </a:r>
           </a:p>
           <a:p>
@@ -3215,7 +3215,7 @@
                   <a:srgbClr val="555555"/>
                 </a:solidFill>
               </a:rPr>
-              <a:t>생성일: 2026-07-05 10:12 KST</a:t>
+              <a:t>생성일: 2026-07-05 19:54 KST</a:t>
             </a:r>
           </a:p>
         </p:txBody>
@@ -4170,7 +4170,7 @@
                   <a:srgbClr val="555555"/>
                 </a:solidFill>
               </a:rPr>
-              <a:t>•  총 1,742건 · 145시간 분량 5분 해상도 수집·분석</a:t>
+              <a:t>•  총 1,965건 · 164시간 분량 5분 해상도 수집·분석</a:t>
             </a:r>
           </a:p>
           <a:p>
@@ -4185,7 +4185,7 @@
                   <a:srgbClr val="555555"/>
                 </a:solidFill>
               </a:rPr>
-              <a:t>•  다층 이상탐지 결과: EWMA:5건 · CUSUM:121건 · IForest:0건 · 잔차:0건 · LSTM-AE:스킵</a:t>
+              <a:t>•  다층 이상탐지 결과: EWMA:5건 · CUSUM:136건 · IForest:0건 · 잔차:0건 · LSTM-AE:스킵</a:t>
             </a:r>
           </a:p>
           <a:p>

--- a/reports/portfolio/latest.pptx
+++ b/reports/portfolio/latest.pptx
@@ -3193,7 +3193,7 @@
                   <a:srgbClr val="555555"/>
                 </a:solidFill>
               </a:rPr>
-              <a:t>분석 기간: 2026-06-29 00:00 ~ 2026-07-05 19:40</a:t>
+              <a:t>분석 기간: 2026-06-29 00:00 ~ 2026-07-05 21:35</a:t>
             </a:r>
           </a:p>
           <a:p>
@@ -3204,7 +3204,7 @@
                   <a:srgbClr val="555555"/>
                 </a:solidFill>
               </a:rPr>
-              <a:t>데이터: 총 1,965건 · 5분 해상도 · 전국 계통 기준</a:t>
+              <a:t>데이터: 총 1,988건 · 5분 해상도 · 전국 계통 기준</a:t>
             </a:r>
           </a:p>
           <a:p>
@@ -3215,7 +3215,7 @@
                   <a:srgbClr val="555555"/>
                 </a:solidFill>
               </a:rPr>
-              <a:t>생성일: 2026-07-05 19:54 KST</a:t>
+              <a:t>생성일: 2026-07-05 21:44 KST</a:t>
             </a:r>
           </a:p>
         </p:txBody>
@@ -4170,7 +4170,7 @@
                   <a:srgbClr val="555555"/>
                 </a:solidFill>
               </a:rPr>
-              <a:t>•  총 1,965건 · 164시간 분량 5분 해상도 수집·분석</a:t>
+              <a:t>•  총 1,988건 · 166시간 분량 5분 해상도 수집·분석</a:t>
             </a:r>
           </a:p>
           <a:p>

--- a/reports/portfolio/latest.pptx
+++ b/reports/portfolio/latest.pptx
@@ -3193,7 +3193,7 @@
                   <a:srgbClr val="555555"/>
                 </a:solidFill>
               </a:rPr>
-              <a:t>분석 기간: 2026-06-29 00:00 ~ 2026-07-05 21:35</a:t>
+              <a:t>분석 기간: 2026-06-29 00:00 ~ 2026-07-05 23:15</a:t>
             </a:r>
           </a:p>
           <a:p>
@@ -3204,7 +3204,7 @@
                   <a:srgbClr val="555555"/>
                 </a:solidFill>
               </a:rPr>
-              <a:t>데이터: 총 1,988건 · 5분 해상도 · 전국 계통 기준</a:t>
+              <a:t>데이터: 총 2,008건 · 5분 해상도 · 전국 계통 기준</a:t>
             </a:r>
           </a:p>
           <a:p>
@@ -3215,7 +3215,7 @@
                   <a:srgbClr val="555555"/>
                 </a:solidFill>
               </a:rPr>
-              <a:t>생성일: 2026-07-05 21:44 KST</a:t>
+              <a:t>생성일: 2026-07-05 23:21 KST</a:t>
             </a:r>
           </a:p>
         </p:txBody>
@@ -4170,7 +4170,7 @@
                   <a:srgbClr val="555555"/>
                 </a:solidFill>
               </a:rPr>
-              <a:t>•  총 1,988건 · 166시간 분량 5분 해상도 수집·분석</a:t>
+              <a:t>•  총 2,008건 · 167시간 분량 5분 해상도 수집·분석</a:t>
             </a:r>
           </a:p>
           <a:p>
@@ -4185,7 +4185,7 @@
                   <a:srgbClr val="555555"/>
                 </a:solidFill>
               </a:rPr>
-              <a:t>•  다층 이상탐지 결과: EWMA:5건 · CUSUM:136건 · IForest:0건 · 잔차:0건 · LSTM-AE:스킵</a:t>
+              <a:t>•  다층 이상탐지 결과: EWMA:5건 · CUSUM:140건 · IForest:0건 · 잔차:0건 · LSTM-AE:스킵</a:t>
             </a:r>
           </a:p>
           <a:p>

--- a/reports/portfolio/latest.pptx
+++ b/reports/portfolio/latest.pptx
@@ -3215,7 +3215,7 @@
                   <a:srgbClr val="555555"/>
                 </a:solidFill>
               </a:rPr>
-              <a:t>생성일: 2026-07-06 00:55 KST</a:t>
+              <a:t>생성일: 2026-07-06 02:34 KST</a:t>
             </a:r>
           </a:p>
         </p:txBody>

--- a/reports/portfolio/latest.pptx
+++ b/reports/portfolio/latest.pptx
@@ -3215,7 +3215,7 @@
                   <a:srgbClr val="555555"/>
                 </a:solidFill>
               </a:rPr>
-              <a:t>생성일: 2026-07-06 02:34 KST</a:t>
+              <a:t>생성일: 2026-07-06 03:51 KST</a:t>
             </a:r>
           </a:p>
         </p:txBody>

--- a/reports/portfolio/latest.pptx
+++ b/reports/portfolio/latest.pptx
@@ -3215,7 +3215,7 @@
                   <a:srgbClr val="555555"/>
                 </a:solidFill>
               </a:rPr>
-              <a:t>생성일: 2026-07-06 03:51 KST</a:t>
+              <a:t>생성일: 2026-07-06 05:33 KST</a:t>
             </a:r>
           </a:p>
         </p:txBody>

--- a/reports/portfolio/latest.pptx
+++ b/reports/portfolio/latest.pptx
@@ -3215,7 +3215,7 @@
                   <a:srgbClr val="555555"/>
                 </a:solidFill>
               </a:rPr>
-              <a:t>생성일: 2026-07-06 05:33 KST</a:t>
+              <a:t>생성일: 2026-07-06 06:45 KST</a:t>
             </a:r>
           </a:p>
         </p:txBody>

--- a/reports/portfolio/latest.pptx
+++ b/reports/portfolio/latest.pptx
@@ -3215,7 +3215,7 @@
                   <a:srgbClr val="555555"/>
                 </a:solidFill>
               </a:rPr>
-              <a:t>생성일: 2026-07-06 06:45 KST</a:t>
+              <a:t>생성일: 2026-07-06 07:44 KST</a:t>
             </a:r>
           </a:p>
         </p:txBody>

--- a/reports/portfolio/latest.pptx
+++ b/reports/portfolio/latest.pptx
@@ -3193,7 +3193,7 @@
                   <a:srgbClr val="555555"/>
                 </a:solidFill>
               </a:rPr>
-              <a:t>분석 기간: 2026-06-29 00:00 ~ 2026-07-06 00:15</a:t>
+              <a:t>분석 기간: 2026-06-29 00:00 ~ 2026-07-06 08:45</a:t>
             </a:r>
           </a:p>
           <a:p>
@@ -3204,7 +3204,7 @@
                   <a:srgbClr val="555555"/>
                 </a:solidFill>
               </a:rPr>
-              <a:t>데이터: 총 2,020건 · 5분 해상도 · 전국 계통 기준</a:t>
+              <a:t>데이터: 총 2,122건 · 5분 해상도 · 전국 계통 기준</a:t>
             </a:r>
           </a:p>
           <a:p>
@@ -3215,7 +3215,7 @@
                   <a:srgbClr val="555555"/>
                 </a:solidFill>
               </a:rPr>
-              <a:t>생성일: 2026-07-06 07:44 KST</a:t>
+              <a:t>생성일: 2026-07-06 08:49 KST</a:t>
             </a:r>
           </a:p>
         </p:txBody>
@@ -4170,7 +4170,7 @@
                   <a:srgbClr val="555555"/>
                 </a:solidFill>
               </a:rPr>
-              <a:t>•  총 2,020건 · 168시간 분량 5분 해상도 수집·분석</a:t>
+              <a:t>•  총 2,122건 · 177시간 분량 5분 해상도 수집·분석</a:t>
             </a:r>
           </a:p>
           <a:p>
@@ -4185,7 +4185,7 @@
                   <a:srgbClr val="555555"/>
                 </a:solidFill>
               </a:rPr>
-              <a:t>•  다층 이상탐지 결과: EWMA:5건 · CUSUM:141건 · IForest:0건 · 잔차:2건 · LSTM-AE:스킵</a:t>
+              <a:t>•  다층 이상탐지 결과: EWMA:5건 · CUSUM:145건 · IForest:0건 · 잔차:4건 · LSTM-AE:스킵</a:t>
             </a:r>
           </a:p>
           <a:p>

--- a/reports/portfolio/latest.pptx
+++ b/reports/portfolio/latest.pptx
@@ -3193,7 +3193,7 @@
                   <a:srgbClr val="555555"/>
                 </a:solidFill>
               </a:rPr>
-              <a:t>분석 기간: 2026-06-29 00:00 ~ 2026-07-06 08:45</a:t>
+              <a:t>분석 기간: 2026-06-29 00:00 ~ 2026-07-06 20:05</a:t>
             </a:r>
           </a:p>
           <a:p>
@@ -3204,7 +3204,7 @@
                   <a:srgbClr val="555555"/>
                 </a:solidFill>
               </a:rPr>
-              <a:t>데이터: 총 2,122건 · 5분 해상도 · 전국 계통 기준</a:t>
+              <a:t>데이터: 총 2,258건 · 5분 해상도 · 전국 계통 기준</a:t>
             </a:r>
           </a:p>
           <a:p>
@@ -3215,7 +3215,7 @@
                   <a:srgbClr val="555555"/>
                 </a:solidFill>
               </a:rPr>
-              <a:t>생성일: 2026-07-06 08:49 KST</a:t>
+              <a:t>생성일: 2026-07-06 20:09 KST</a:t>
             </a:r>
           </a:p>
         </p:txBody>
@@ -4170,7 +4170,7 @@
                   <a:srgbClr val="555555"/>
                 </a:solidFill>
               </a:rPr>
-              <a:t>•  총 2,122건 · 177시간 분량 5분 해상도 수집·분석</a:t>
+              <a:t>•  총 2,258건 · 188시간 분량 5분 해상도 수집·분석</a:t>
             </a:r>
           </a:p>
           <a:p>
@@ -4185,7 +4185,7 @@
                   <a:srgbClr val="555555"/>
                 </a:solidFill>
               </a:rPr>
-              <a:t>•  다층 이상탐지 결과: EWMA:5건 · CUSUM:145건 · IForest:0건 · 잔차:4건 · LSTM-AE:스킵</a:t>
+              <a:t>•  다층 이상탐지 결과: EWMA:5건 · CUSUM:162건 · IForest:0건 · 잔차:4건 · LSTM-AE:스킵</a:t>
             </a:r>
           </a:p>
           <a:p>
@@ -4200,7 +4200,7 @@
                   <a:srgbClr val="555555"/>
                 </a:solidFill>
               </a:rPr>
-              <a:t>•  최대 부하: 79,027 MW (06-30 18:40)</a:t>
+              <a:t>•  최대 부하: 83,396 MW (07-06 18:45)</a:t>
             </a:r>
           </a:p>
           <a:p>

--- a/reports/portfolio/latest.pptx
+++ b/reports/portfolio/latest.pptx
@@ -3193,7 +3193,7 @@
                   <a:srgbClr val="555555"/>
                 </a:solidFill>
               </a:rPr>
-              <a:t>분석 기간: 2026-06-29 00:00 ~ 2026-07-06 20:05</a:t>
+              <a:t>분석 기간: 2026-06-29 00:00 ~ 2026-07-06 20:25</a:t>
             </a:r>
           </a:p>
           <a:p>
@@ -3204,7 +3204,7 @@
                   <a:srgbClr val="555555"/>
                 </a:solidFill>
               </a:rPr>
-              <a:t>데이터: 총 2,258건 · 5분 해상도 · 전국 계통 기준</a:t>
+              <a:t>데이터: 총 2,262건 · 5분 해상도 · 전국 계통 기준</a:t>
             </a:r>
           </a:p>
           <a:p>
@@ -3215,7 +3215,7 @@
                   <a:srgbClr val="555555"/>
                 </a:solidFill>
               </a:rPr>
-              <a:t>생성일: 2026-07-06 20:09 KST</a:t>
+              <a:t>생성일: 2026-07-06 23:39 KST</a:t>
             </a:r>
           </a:p>
         </p:txBody>
@@ -4170,7 +4170,7 @@
                   <a:srgbClr val="555555"/>
                 </a:solidFill>
               </a:rPr>
-              <a:t>•  총 2,258건 · 188시간 분량 5분 해상도 수집·분석</a:t>
+              <a:t>•  총 2,262건 · 188시간 분량 5분 해상도 수집·분석</a:t>
             </a:r>
           </a:p>
           <a:p>
@@ -4185,7 +4185,7 @@
                   <a:srgbClr val="555555"/>
                 </a:solidFill>
               </a:rPr>
-              <a:t>•  다층 이상탐지 결과: EWMA:5건 · CUSUM:162건 · IForest:0건 · 잔차:4건 · LSTM-AE:스킵</a:t>
+              <a:t>•  다층 이상탐지 결과: EWMA:5건 · CUSUM:162건 · IForest:0건 · 잔차:3건 · LSTM-AE:스킵</a:t>
             </a:r>
           </a:p>
           <a:p>

--- a/reports/portfolio/latest.pptx
+++ b/reports/portfolio/latest.pptx
@@ -3215,7 +3215,7 @@
                   <a:srgbClr val="555555"/>
                 </a:solidFill>
               </a:rPr>
-              <a:t>생성일: 2026-07-07 02:31 KST</a:t>
+              <a:t>생성일: 2026-07-07 04:25 KST</a:t>
             </a:r>
           </a:p>
         </p:txBody>

--- a/reports/portfolio/latest.pptx
+++ b/reports/portfolio/latest.pptx
@@ -3215,7 +3215,7 @@
                   <a:srgbClr val="555555"/>
                 </a:solidFill>
               </a:rPr>
-              <a:t>생성일: 2026-07-07 04:25 KST</a:t>
+              <a:t>생성일: 2026-07-07 06:16 KST</a:t>
             </a:r>
           </a:p>
         </p:txBody>

--- a/reports/portfolio/latest.pptx
+++ b/reports/portfolio/latest.pptx
@@ -3215,7 +3215,7 @@
                   <a:srgbClr val="555555"/>
                 </a:solidFill>
               </a:rPr>
-              <a:t>생성일: 2026-07-07 06:16 KST</a:t>
+              <a:t>생성일: 2026-07-07 07:42 KST</a:t>
             </a:r>
           </a:p>
         </p:txBody>

--- a/reports/portfolio/latest.pptx
+++ b/reports/portfolio/latest.pptx
@@ -3193,7 +3193,7 @@
                   <a:srgbClr val="555555"/>
                 </a:solidFill>
               </a:rPr>
-              <a:t>분석 기간: 2026-06-29 00:00 ~ 2026-07-07 00:35</a:t>
+              <a:t>분석 기간: 2026-06-29 00:00 ~ 2026-07-07 08:45</a:t>
             </a:r>
           </a:p>
           <a:p>
@@ -3204,7 +3204,7 @@
                   <a:srgbClr val="555555"/>
                 </a:solidFill>
               </a:rPr>
-              <a:t>데이터: 총 2,312건 · 5분 해상도 · 전국 계통 기준</a:t>
+              <a:t>데이터: 총 2,410건 · 5분 해상도 · 전국 계통 기준</a:t>
             </a:r>
           </a:p>
           <a:p>
@@ -3215,7 +3215,7 @@
                   <a:srgbClr val="555555"/>
                 </a:solidFill>
               </a:rPr>
-              <a:t>생성일: 2026-07-07 07:42 KST</a:t>
+              <a:t>생성일: 2026-07-07 08:51 KST</a:t>
             </a:r>
           </a:p>
         </p:txBody>
@@ -4170,7 +4170,7 @@
                   <a:srgbClr val="555555"/>
                 </a:solidFill>
               </a:rPr>
-              <a:t>•  총 2,312건 · 193시간 분량 5분 해상도 수집·분석</a:t>
+              <a:t>•  총 2,410건 · 201시간 분량 5분 해상도 수집·분석</a:t>
             </a:r>
           </a:p>
           <a:p>
@@ -4185,7 +4185,7 @@
                   <a:srgbClr val="555555"/>
                 </a:solidFill>
               </a:rPr>
-              <a:t>•  다층 이상탐지 결과: EWMA:6건 · CUSUM:164건 · IForest:0건 · 잔차:4건 · LSTM-AE:스킵</a:t>
+              <a:t>•  다층 이상탐지 결과: EWMA:6건 · CUSUM:170건 · IForest:0건 · 잔차:8건 · LSTM-AE:스킵</a:t>
             </a:r>
           </a:p>
           <a:p>
